--- a/assets/ppts/M1.9_Application_Layer_Case_Study.pptx
+++ b/assets/ppts/M1.9_Application_Layer_Case_Study.pptx
@@ -8,6 +8,7 @@
     <p:sldId id="256" r:id="rId7"/>
     <p:sldId id="257" r:id="rId8"/>
     <p:sldId id="258" r:id="rId9"/>
+    <p:sldId id="259" r:id="rId10"/>
   </p:sldIdLst>
   <p:sldSz cx="12191695" cy="6858000" type="screen4x3"/>
   <p:notesSz cx="6858000" cy="9144000"/>
@@ -3141,8 +3142,8 @@
         </p:nvSpPr>
         <p:spPr>
           <a:xfrm>
-            <a:off x="822960" y="1188720"/>
-            <a:ext cx="164592" cy="4480560"/>
+            <a:off x="0" y="0"/>
+            <a:ext cx="12191695" cy="137160"/>
           </a:xfrm>
           <a:prstGeom prst="rect">
             <a:avLst/>
@@ -3178,14 +3179,57 @@
       </p:sp>
       <p:sp>
         <p:nvSpPr>
-          <p:cNvPr id="4" name="TextBox 3"/>
+          <p:cNvPr id="4" name="Rectangle 3"/>
+          <p:cNvSpPr/>
+          <p:nvPr/>
+        </p:nvSpPr>
+        <p:spPr>
+          <a:xfrm>
+            <a:off x="822960" y="1097280"/>
+            <a:ext cx="164592" cy="4663440"/>
+          </a:xfrm>
+          <a:prstGeom prst="rect">
+            <a:avLst/>
+          </a:prstGeom>
+          <a:solidFill>
+            <a:srgbClr val="D97706"/>
+          </a:solidFill>
+          <a:ln>
+            <a:noFill/>
+          </a:ln>
+        </p:spPr>
+        <p:style>
+          <a:lnRef idx="1">
+            <a:schemeClr val="accent1"/>
+          </a:lnRef>
+          <a:fillRef idx="3">
+            <a:schemeClr val="accent1"/>
+          </a:fillRef>
+          <a:effectRef idx="2">
+            <a:schemeClr val="accent1"/>
+          </a:effectRef>
+          <a:fontRef idx="minor">
+            <a:schemeClr val="lt1"/>
+          </a:fontRef>
+        </p:style>
+        <p:txBody>
+          <a:bodyPr rtlCol="0" anchor="ctr"/>
+          <a:lstStyle/>
+          <a:p>
+            <a:pPr algn="ctr"/>
+          </a:p>
+        </p:txBody>
+      </p:sp>
+      <p:sp>
+        <p:nvSpPr>
+          <p:cNvPr id="5" name="TextBox 4"/>
           <p:cNvSpPr txBox="1"/>
           <p:nvPr/>
         </p:nvSpPr>
         <p:spPr>
           <a:xfrm>
-            <a:off x="1280160" y="1097280"/>
-            <a:ext cx="10058400" cy="4663440"/>
+            <a:off x="1234440" y="1005840"/>
+            <a:ext cx="10241280" cy="4846320"/>
           </a:xfrm>
           <a:prstGeom prst="rect">
             <a:avLst/>
@@ -3200,70 +3244,165 @@
           <a:p>
             <a:pPr>
               <a:spcAft>
+                <a:spcPts val="1000"/>
+              </a:spcAft>
+              <a:defRPr b="1" sz="1300">
+                <a:solidFill>
+                  <a:srgbClr val="D97706"/>
+                </a:solidFill>
+              </a:defRPr>
+            </a:pPr>
+            <a:r>
+              <a:t>PCCST501 Computer Networks | KTU 2024 Scheme • MODULE 1 • M1.9</a:t>
+            </a:r>
+          </a:p>
+          <a:p>
+            <a:pPr>
+              <a:spcAft>
                 <a:spcPts val="1200"/>
               </a:spcAft>
-              <a:defRPr b="1" sz="1300">
-                <a:solidFill>
-                  <a:srgbClr val="D97706"/>
+              <a:defRPr b="1" sz="3000">
+                <a:solidFill>
+                  <a:srgbClr val="F8FAFC"/>
                 </a:solidFill>
               </a:defRPr>
             </a:pPr>
             <a:r>
-              <a:t>PCCST501 Computer Networks | KTU 2024 Scheme • MODULE 1 • M1.9</a:t>
+              <a:t>Application Layer Case Study: CDNs &amp; Video Streaming</a:t>
             </a:r>
           </a:p>
           <a:p>
             <a:pPr>
               <a:spcAft>
-                <a:spcPts val="1400"/>
+                <a:spcPts val="2400"/>
               </a:spcAft>
-              <a:defRPr b="1" sz="3200">
-                <a:solidFill>
-                  <a:srgbClr val="F8FAFC"/>
+              <a:defRPr sz="1600">
+                <a:solidFill>
+                  <a:srgbClr val="94A3B8"/>
                 </a:solidFill>
               </a:defRPr>
             </a:pPr>
             <a:r>
-              <a:t>Application Layer Case Study &amp; Socket Mapping</a:t>
+              <a:t>Content Distribution Networks (CDNs), DNS Redirection, Edge Server Placement, DASH (Dynamic Adaptive Streaming over HTTP)</a:t>
             </a:r>
           </a:p>
           <a:p>
             <a:pPr>
               <a:spcAft>
-                <a:spcPts val="2800"/>
+                <a:spcPts val="300"/>
               </a:spcAft>
-              <a:defRPr sz="1700">
+              <a:defRPr b="1" sz="1350">
+                <a:solidFill>
+                  <a:srgbClr val="E2E8F0"/>
+                </a:solidFill>
+              </a:defRPr>
+            </a:pPr>
+            <a:r>
+              <a:t>Prepared by: Prof. Anju Markose | Assistant Professor, Dept. of CSE | VJCET</a:t>
+            </a:r>
+          </a:p>
+          <a:p>
+            <a:pPr>
+              <a:defRPr sz="1150">
                 <a:solidFill>
                   <a:srgbClr val="94A3B8"/>
                 </a:solidFill>
               </a:defRPr>
             </a:pPr>
             <a:r>
-              <a:t>Comprehensive Protocol Comparison, Port Addressing Summary, and Socket API Interface Mapping</a:t>
-            </a:r>
-          </a:p>
+              <a:t>Viswajyothi College of Engineering and Technology (VJCET), Vazhakulam • KTU S5 CSE</a:t>
+            </a:r>
+          </a:p>
+        </p:txBody>
+      </p:sp>
+      <p:sp>
+        <p:nvSpPr>
+          <p:cNvPr id="6" name="Rounded Rectangle 5"/>
+          <p:cNvSpPr/>
+          <p:nvPr/>
+        </p:nvSpPr>
+        <p:spPr>
+          <a:xfrm>
+            <a:off x="8412480" y="5120640"/>
+            <a:ext cx="3017520" cy="822960"/>
+          </a:xfrm>
+          <a:prstGeom prst="roundRect">
+            <a:avLst/>
+          </a:prstGeom>
+          <a:solidFill>
+            <a:srgbClr val="1E293B"/>
+          </a:solidFill>
+          <a:ln w="12700">
+            <a:solidFill>
+              <a:srgbClr val="0E7490"/>
+            </a:solidFill>
+          </a:ln>
+        </p:spPr>
+        <p:style>
+          <a:lnRef idx="1">
+            <a:schemeClr val="accent1"/>
+          </a:lnRef>
+          <a:fillRef idx="3">
+            <a:schemeClr val="accent1"/>
+          </a:fillRef>
+          <a:effectRef idx="2">
+            <a:schemeClr val="accent1"/>
+          </a:effectRef>
+          <a:fontRef idx="minor">
+            <a:schemeClr val="lt1"/>
+          </a:fontRef>
+        </p:style>
+        <p:txBody>
+          <a:bodyPr rtlCol="0" anchor="ctr"/>
+          <a:lstStyle/>
+          <a:p>
+            <a:pPr algn="ctr"/>
+          </a:p>
+        </p:txBody>
+      </p:sp>
+      <p:sp>
+        <p:nvSpPr>
+          <p:cNvPr id="7" name="TextBox 6"/>
+          <p:cNvSpPr txBox="1"/>
+          <p:nvPr/>
+        </p:nvSpPr>
+        <p:spPr>
+          <a:xfrm>
+            <a:off x="8503920" y="5166360"/>
+            <a:ext cx="2834640" cy="731520"/>
+          </a:xfrm>
+          <a:prstGeom prst="rect">
+            <a:avLst/>
+          </a:prstGeom>
+          <a:noFill/>
+        </p:spPr>
+        <p:txBody>
+          <a:bodyPr wrap="none">
+            <a:spAutoFit/>
+          </a:bodyPr>
+          <a:lstStyle/>
           <a:p>
             <a:pPr>
-              <a:defRPr b="1" sz="1300">
-                <a:solidFill>
-                  <a:srgbClr val="E2E8F0"/>
+              <a:defRPr b="1" sz="1050">
+                <a:solidFill>
+                  <a:srgbClr val="D97706"/>
                 </a:solidFill>
               </a:defRPr>
             </a:pPr>
             <a:r>
-              <a:t>Prepared by: Prof. Anju Markose | Assistant Professor, Dept. of CSE | VJCET</a:t>
+              <a:t>KTU B.Tech Curriculum</a:t>
             </a:r>
           </a:p>
           <a:p>
             <a:pPr>
-              <a:defRPr sz="1100">
-                <a:solidFill>
-                  <a:srgbClr val="94A3B8"/>
+              <a:defRPr sz="950">
+                <a:solidFill>
+                  <a:srgbClr val="F8FAFC"/>
                 </a:solidFill>
               </a:defRPr>
             </a:pPr>
             <a:r>
-              <a:t>Viswajyothi College of Engineering and Technology (VJCET), Vazhakulam</a:t>
+              <a:t>Official Classroom Slide Deck</a:t>
             </a:r>
           </a:p>
         </p:txBody>
@@ -3395,14 +3534,14 @@
           <a:lstStyle/>
           <a:p>
             <a:pPr>
-              <a:defRPr b="1" sz="2300">
+              <a:defRPr b="1" sz="2200">
                 <a:solidFill>
                   <a:srgbClr val="F8FAFC"/>
                 </a:solidFill>
               </a:defRPr>
             </a:pPr>
             <a:r>
-              <a:t>1.9.1 Master Protocol Comparison Matrix</a:t>
+              <a:t>1.9.1 Content Distribution Networks (CDNs)</a:t>
             </a:r>
           </a:p>
         </p:txBody>
@@ -3437,27 +3576,170 @@
               </a:defRPr>
             </a:pPr>
             <a:r>
-              <a:t>M1.9 PROTOCOL MATRIX</a:t>
-            </a:r>
-          </a:p>
-        </p:txBody>
-      </p:sp>
-      <p:sp>
-        <p:nvSpPr>
-          <p:cNvPr id="6" name="Rounded Rectangle 5"/>
+              <a:t>M1.9 CDN ARCHITECTURE</a:t>
+            </a:r>
+          </a:p>
+        </p:txBody>
+      </p:sp>
+      <p:sp>
+        <p:nvSpPr>
+          <p:cNvPr id="6" name="TextBox 5"/>
+          <p:cNvSpPr txBox="1"/>
+          <p:nvPr/>
+        </p:nvSpPr>
+        <p:spPr>
+          <a:xfrm>
+            <a:off x="731520" y="1234440"/>
+            <a:ext cx="6858000" cy="4937760"/>
+          </a:xfrm>
+          <a:prstGeom prst="rect">
+            <a:avLst/>
+          </a:prstGeom>
+          <a:noFill/>
+        </p:spPr>
+        <p:txBody>
+          <a:bodyPr wrap="square">
+            <a:spAutoFit/>
+          </a:bodyPr>
+          <a:lstStyle/>
+          <a:p>
+            <a:pPr>
+              <a:spcAft>
+                <a:spcPts val="200"/>
+              </a:spcAft>
+              <a:defRPr b="1" sz="1450">
+                <a:solidFill>
+                  <a:srgbClr val="0F1E4A"/>
+                </a:solidFill>
+              </a:defRPr>
+            </a:pPr>
+            <a:r>
+              <a:t>• The Web Scale Problem</a:t>
+            </a:r>
+          </a:p>
+          <a:p>
+            <a:pPr>
+              <a:spcAft>
+                <a:spcPts val="700"/>
+              </a:spcAft>
+              <a:defRPr sz="1250">
+                <a:solidFill>
+                  <a:srgbClr val="0F172A"/>
+                </a:solidFill>
+              </a:defRPr>
+            </a:pPr>
+            <a:r>
+              <a:t>   Serving massive video traffic (YouTube, Netflix) from a single mega data center causes single point of failure, network congestion, long-distance delay, and repeated link traversals.</a:t>
+            </a:r>
+          </a:p>
+          <a:p>
+            <a:pPr>
+              <a:spcAft>
+                <a:spcPts val="200"/>
+              </a:spcAft>
+              <a:defRPr b="1" sz="1450">
+                <a:solidFill>
+                  <a:srgbClr val="0F1E4A"/>
+                </a:solidFill>
+              </a:defRPr>
+            </a:pPr>
+            <a:r>
+              <a:t>• CDN Philosophy</a:t>
+            </a:r>
+          </a:p>
+          <a:p>
+            <a:pPr>
+              <a:spcAft>
+                <a:spcPts val="700"/>
+              </a:spcAft>
+              <a:defRPr sz="1250">
+                <a:solidFill>
+                  <a:srgbClr val="0F172A"/>
+                </a:solidFill>
+              </a:defRPr>
+            </a:pPr>
+            <a:r>
+              <a:t>   Deploy thousands of geographically distributed server clusters (Points of Presence - PoPs) at edge ISPs across the globe. Store replicated video copies close to end users.</a:t>
+            </a:r>
+          </a:p>
+          <a:p>
+            <a:pPr>
+              <a:spcAft>
+                <a:spcPts val="200"/>
+              </a:spcAft>
+              <a:defRPr b="1" sz="1450">
+                <a:solidFill>
+                  <a:srgbClr val="0F1E4A"/>
+                </a:solidFill>
+              </a:defRPr>
+            </a:pPr>
+            <a:r>
+              <a:t>• Server Placement Philosophies</a:t>
+            </a:r>
+          </a:p>
+          <a:p>
+            <a:pPr>
+              <a:spcAft>
+                <a:spcPts val="700"/>
+              </a:spcAft>
+              <a:defRPr sz="1250">
+                <a:solidFill>
+                  <a:srgbClr val="0F172A"/>
+                </a:solidFill>
+              </a:defRPr>
+            </a:pPr>
+            <a:r>
+              <a:t>   1. Enter Deep (Akamai): Deploy clusters inside thousands of access ISPs close to users. 2. Bring Home (Limelight): Deploy fewer large clusters at Tier-1 PoPs interconnected by private backbone.</a:t>
+            </a:r>
+          </a:p>
+          <a:p>
+            <a:pPr>
+              <a:spcAft>
+                <a:spcPts val="200"/>
+              </a:spcAft>
+              <a:defRPr b="1" sz="1450">
+                <a:solidFill>
+                  <a:srgbClr val="0F1E4A"/>
+                </a:solidFill>
+              </a:defRPr>
+            </a:pPr>
+            <a:r>
+              <a:t>• CDN DNS Redirection</a:t>
+            </a:r>
+          </a:p>
+          <a:p>
+            <a:pPr>
+              <a:spcAft>
+                <a:spcPts val="700"/>
+              </a:spcAft>
+              <a:defRPr sz="1250">
+                <a:solidFill>
+                  <a:srgbClr val="0F172A"/>
+                </a:solidFill>
+              </a:defRPr>
+            </a:pPr>
+            <a:r>
+              <a:t>   When user requests `video.netflix.com`, authoritative DNS intercepts the request and returns a CNAME pointing to CDN domain. CDN's DNS resolver uses client IP to return the IP address of the geographically closest edge cache server.</a:t>
+            </a:r>
+          </a:p>
+        </p:txBody>
+      </p:sp>
+      <p:sp>
+        <p:nvSpPr>
+          <p:cNvPr id="7" name="Rounded Rectangle 6"/>
           <p:cNvSpPr/>
           <p:nvPr/>
         </p:nvSpPr>
         <p:spPr>
           <a:xfrm>
-            <a:off x="731520" y="1280160"/>
-            <a:ext cx="5212080" cy="4846320"/>
+            <a:off x="7955279" y="1234440"/>
+            <a:ext cx="3566160" cy="4892040"/>
           </a:xfrm>
           <a:prstGeom prst="roundRect">
             <a:avLst/>
           </a:prstGeom>
           <a:solidFill>
-            <a:srgbClr val="F1F5F9"/>
+            <a:srgbClr val="F8FAFC"/>
           </a:solidFill>
           <a:ln w="19050">
             <a:solidFill>
@@ -3489,14 +3771,14 @@
       </p:sp>
       <p:sp>
         <p:nvSpPr>
-          <p:cNvPr id="7" name="TextBox 6"/>
+          <p:cNvPr id="8" name="TextBox 7"/>
           <p:cNvSpPr txBox="1"/>
           <p:nvPr/>
         </p:nvSpPr>
         <p:spPr>
           <a:xfrm>
-            <a:off x="914400" y="1417320"/>
-            <a:ext cx="4846320" cy="4572000"/>
+            <a:off x="8138160" y="1371600"/>
+            <a:ext cx="3200400" cy="4572000"/>
           </a:xfrm>
           <a:prstGeom prst="rect">
             <a:avLst/>
@@ -3511,16 +3793,16 @@
           <a:p>
             <a:pPr>
               <a:spcAft>
-                <a:spcPts val="1200"/>
+                <a:spcPts val="1000"/>
               </a:spcAft>
-              <a:defRPr b="1" sz="1600">
-                <a:solidFill>
-                  <a:srgbClr val="0F1E4A"/>
+              <a:defRPr b="1" sz="1500">
+                <a:solidFill>
+                  <a:srgbClr val="0E7490"/>
                 </a:solidFill>
               </a:defRPr>
             </a:pPr>
             <a:r>
-              <a:t>Web &amp; File Transfer Protocols</a:t>
+              <a:t>CDN Benefits</a:t>
             </a:r>
           </a:p>
           <a:p>
@@ -3528,14 +3810,14 @@
               <a:spcAft>
                 <a:spcPts val="600"/>
               </a:spcAft>
-              <a:defRPr sz="1250">
-                <a:solidFill>
-                  <a:srgbClr val="1E293B"/>
+              <a:defRPr sz="1200">
+                <a:solidFill>
+                  <a:srgbClr val="0F172A"/>
                 </a:solidFill>
               </a:defRPr>
             </a:pPr>
             <a:r>
-              <a:t>• HTTP/1.1: TCP Port 80, In-band, Stateless, Persistent</a:t>
+              <a:t>→ Ultra-low latency to users</a:t>
             </a:r>
           </a:p>
           <a:p>
@@ -3543,14 +3825,14 @@
               <a:spcAft>
                 <a:spcPts val="600"/>
               </a:spcAft>
-              <a:defRPr sz="1250">
-                <a:solidFill>
-                  <a:srgbClr val="1E293B"/>
+              <a:defRPr sz="1200">
+                <a:solidFill>
+                  <a:srgbClr val="0F172A"/>
                 </a:solidFill>
               </a:defRPr>
             </a:pPr>
             <a:r>
-              <a:t>• HTTP/2 &amp; HTTP/3: TCP/443 &amp; UDP/443, Multiplexed, Binary</a:t>
+              <a:t>→ Reduces ISP transit costs</a:t>
             </a:r>
           </a:p>
           <a:p>
@@ -3558,14 +3840,14 @@
               <a:spcAft>
                 <a:spcPts val="600"/>
               </a:spcAft>
-              <a:defRPr sz="1250">
-                <a:solidFill>
-                  <a:srgbClr val="1E293B"/>
+              <a:defRPr sz="1200">
+                <a:solidFill>
+                  <a:srgbClr val="0F172A"/>
                 </a:solidFill>
               </a:defRPr>
             </a:pPr>
             <a:r>
-              <a:t>• FTP Control: TCP Port 21, Out-of-band, Stateful</a:t>
+              <a:t>→ Absorbs DDoS attacks</a:t>
             </a:r>
           </a:p>
           <a:p>
@@ -3573,75 +3855,15 @@
               <a:spcAft>
                 <a:spcPts val="600"/>
               </a:spcAft>
-              <a:defRPr sz="1250">
-                <a:solidFill>
-                  <a:srgbClr val="1E293B"/>
+              <a:defRPr sz="1200">
+                <a:solidFill>
+                  <a:srgbClr val="0F172A"/>
                 </a:solidFill>
               </a:defRPr>
             </a:pPr>
             <a:r>
-              <a:t>• FTP Data: TCP Port 20 (or Ephemeral), Closed per file</a:t>
-            </a:r>
-          </a:p>
-          <a:p>
-            <a:pPr>
-              <a:spcAft>
-                <a:spcPts val="600"/>
-              </a:spcAft>
-              <a:defRPr sz="1250">
-                <a:solidFill>
-                  <a:srgbClr val="1E293B"/>
-                </a:solidFill>
-              </a:defRPr>
-            </a:pPr>
-            <a:r>
-              <a:t>• DNS: UDP Port 53 (TCP for zone transfers), Hierarchical</a:t>
-            </a:r>
-          </a:p>
-        </p:txBody>
-      </p:sp>
-      <p:sp>
-        <p:nvSpPr>
-          <p:cNvPr id="8" name="Rounded Rectangle 7"/>
-          <p:cNvSpPr/>
-          <p:nvPr/>
-        </p:nvSpPr>
-        <p:spPr>
-          <a:xfrm>
-            <a:off x="6309360" y="1280160"/>
-            <a:ext cx="5212080" cy="4846320"/>
-          </a:xfrm>
-          <a:prstGeom prst="roundRect">
-            <a:avLst/>
-          </a:prstGeom>
-          <a:solidFill>
-            <a:srgbClr val="EEF2FF"/>
-          </a:solidFill>
-          <a:ln w="19050">
-            <a:solidFill>
-              <a:srgbClr val="0F1E4A"/>
-            </a:solidFill>
-          </a:ln>
-        </p:spPr>
-        <p:style>
-          <a:lnRef idx="1">
-            <a:schemeClr val="accent1"/>
-          </a:lnRef>
-          <a:fillRef idx="3">
-            <a:schemeClr val="accent1"/>
-          </a:fillRef>
-          <a:effectRef idx="2">
-            <a:schemeClr val="accent1"/>
-          </a:effectRef>
-          <a:fontRef idx="minor">
-            <a:schemeClr val="lt1"/>
-          </a:fontRef>
-        </p:style>
-        <p:txBody>
-          <a:bodyPr rtlCol="0" anchor="ctr"/>
-          <a:lstStyle/>
-          <a:p>
-            <a:pPr algn="ctr"/>
+              <a:t>→ High availability &amp; redundancy</a:t>
+            </a:r>
           </a:p>
         </p:txBody>
       </p:sp>
@@ -3653,8 +3875,8 @@
         </p:nvSpPr>
         <p:spPr>
           <a:xfrm>
-            <a:off x="6492240" y="1417320"/>
-            <a:ext cx="4846320" cy="4572000"/>
+            <a:off x="731520" y="6327648"/>
+            <a:ext cx="10789920" cy="320040"/>
           </a:xfrm>
           <a:prstGeom prst="rect">
             <a:avLst/>
@@ -3662,98 +3884,20 @@
           <a:noFill/>
         </p:spPr>
         <p:txBody>
-          <a:bodyPr wrap="square">
+          <a:bodyPr wrap="none">
             <a:spAutoFit/>
           </a:bodyPr>
           <a:lstStyle/>
           <a:p>
             <a:pPr>
-              <a:spcAft>
-                <a:spcPts val="1200"/>
-              </a:spcAft>
-              <a:defRPr b="1" sz="1600">
-                <a:solidFill>
-                  <a:srgbClr val="0E7490"/>
+              <a:defRPr sz="950">
+                <a:solidFill>
+                  <a:srgbClr val="64748B"/>
                 </a:solidFill>
               </a:defRPr>
             </a:pPr>
             <a:r>
-              <a:t>Email &amp; P2P Protocols</a:t>
-            </a:r>
-          </a:p>
-          <a:p>
-            <a:pPr>
-              <a:spcAft>
-                <a:spcPts val="600"/>
-              </a:spcAft>
-              <a:defRPr sz="1250">
-                <a:solidFill>
-                  <a:srgbClr val="1E293B"/>
-                </a:solidFill>
-              </a:defRPr>
-            </a:pPr>
-            <a:r>
-              <a:t>• SMTP: TCP Port 25/587, Push model, 7-bit ASCII</a:t>
-            </a:r>
-          </a:p>
-          <a:p>
-            <a:pPr>
-              <a:spcAft>
-                <a:spcPts val="600"/>
-              </a:spcAft>
-              <a:defRPr sz="1250">
-                <a:solidFill>
-                  <a:srgbClr val="1E293B"/>
-                </a:solidFill>
-              </a:defRPr>
-            </a:pPr>
-            <a:r>
-              <a:t>• POP3: TCP Port 110, Pull model, Download &amp; Delete</a:t>
-            </a:r>
-          </a:p>
-          <a:p>
-            <a:pPr>
-              <a:spcAft>
-                <a:spcPts val="600"/>
-              </a:spcAft>
-              <a:defRPr sz="1250">
-                <a:solidFill>
-                  <a:srgbClr val="1E293B"/>
-                </a:solidFill>
-              </a:defRPr>
-            </a:pPr>
-            <a:r>
-              <a:t>• IMAP4: TCP Port 143, Pull model, Remote folder sync</a:t>
-            </a:r>
-          </a:p>
-          <a:p>
-            <a:pPr>
-              <a:spcAft>
-                <a:spcPts val="600"/>
-              </a:spcAft>
-              <a:defRPr sz="1250">
-                <a:solidFill>
-                  <a:srgbClr val="1E293B"/>
-                </a:solidFill>
-              </a:defRPr>
-            </a:pPr>
-            <a:r>
-              <a:t>• BitTorrent: P2P over TCP/UDP, Swarm-based, Tit-for-Tat</a:t>
-            </a:r>
-          </a:p>
-          <a:p>
-            <a:pPr>
-              <a:spcAft>
-                <a:spcPts val="600"/>
-              </a:spcAft>
-              <a:defRPr sz="1250">
-                <a:solidFill>
-                  <a:srgbClr val="1E293B"/>
-                </a:solidFill>
-              </a:defRPr>
-            </a:pPr>
-            <a:r>
-              <a:t>• MIME: Encapsulation header &amp; Base64 binary encoding</a:t>
+              <a:t>PCCST501 Computer Networks | KTU 2024 Scheme | Prof. Anju Markose | Assistant Professor, Dept. of CSE | VJCET</a:t>
             </a:r>
           </a:p>
         </p:txBody>
@@ -3766,8 +3910,8 @@
         </p:nvSpPr>
         <p:spPr>
           <a:xfrm>
-            <a:off x="731520" y="6309360"/>
-            <a:ext cx="10789920" cy="365760"/>
+            <a:off x="6858000" y="6327648"/>
+            <a:ext cx="4572000" cy="320040"/>
           </a:xfrm>
           <a:prstGeom prst="rect">
             <a:avLst/>
@@ -3780,7 +3924,7 @@
           </a:bodyPr>
           <a:lstStyle/>
           <a:p>
-            <a:pPr>
+            <a:pPr algn="r">
               <a:defRPr sz="950">
                 <a:solidFill>
                   <a:srgbClr val="64748B"/>
@@ -3788,7 +3932,7 @@
               </a:defRPr>
             </a:pPr>
             <a:r>
-              <a:t>PCCST501 Computer Networks | KTU 2024 Scheme | Prof. Anju Markose | Assistant Professor, Dept. of CSE | VJCET</a:t>
+              <a:t>Dept. of CSE, VJCET</a:t>
             </a:r>
           </a:p>
         </p:txBody>
@@ -3920,14 +4064,14 @@
           <a:lstStyle/>
           <a:p>
             <a:pPr>
-              <a:defRPr b="1" sz="2300">
+              <a:defRPr b="1" sz="2200">
                 <a:solidFill>
                   <a:srgbClr val="F8FAFC"/>
                 </a:solidFill>
               </a:defRPr>
             </a:pPr>
             <a:r>
-              <a:t>1.9.2 Socket Interface &amp; Application Layer Integration</a:t>
+              <a:t>1.9.2 DASH: Dynamic Adaptive Streaming over HTTP</a:t>
             </a:r>
           </a:p>
         </p:txBody>
@@ -3962,7 +4106,7 @@
               </a:defRPr>
             </a:pPr>
             <a:r>
-              <a:t>M1.9 SOCKET INTEGRATION</a:t>
+              <a:t>M1.9 DASH VIDEO</a:t>
             </a:r>
           </a:p>
         </p:txBody>
@@ -3975,7 +4119,7 @@
         </p:nvSpPr>
         <p:spPr>
           <a:xfrm>
-            <a:off x="731520" y="1280160"/>
+            <a:off x="731520" y="1234440"/>
             <a:ext cx="6858000" cy="4937760"/>
           </a:xfrm>
           <a:prstGeom prst="rect">
@@ -3993,29 +4137,29 @@
               <a:spcAft>
                 <a:spcPts val="200"/>
               </a:spcAft>
-              <a:defRPr b="1" sz="1500">
+              <a:defRPr b="1" sz="1450">
                 <a:solidFill>
                   <a:srgbClr val="0F1E4A"/>
                 </a:solidFill>
               </a:defRPr>
             </a:pPr>
             <a:r>
-              <a:t>• Socket as Application Doorway</a:t>
+              <a:t>• Video Encoding &amp; Chunks</a:t>
             </a:r>
           </a:p>
           <a:p>
             <a:pPr>
               <a:spcAft>
-                <a:spcPts val="800"/>
+                <a:spcPts val="700"/>
               </a:spcAft>
-              <a:defRPr sz="1300">
-                <a:solidFill>
-                  <a:srgbClr val="1E293B"/>
+              <a:defRPr sz="1250">
+                <a:solidFill>
+                  <a:srgbClr val="0F172A"/>
                 </a:solidFill>
               </a:defRPr>
             </a:pPr>
             <a:r>
-              <a:t>   Application processes interact with the operating system networking stack via the Berkeley Socket API.</a:t>
+              <a:t>   Video is pre-encoded at multiple quality/bitrate versions (e.g., 360p 500 kbps, 720p 2 Mbps, 1080p 5 Mbps, 4K 15 Mbps) and partitioned into small chunks (2 to 10 seconds each).</a:t>
             </a:r>
           </a:p>
           <a:p>
@@ -4023,29 +4167,29 @@
               <a:spcAft>
                 <a:spcPts val="200"/>
               </a:spcAft>
-              <a:defRPr b="1" sz="1500">
+              <a:defRPr b="1" sz="1450">
                 <a:solidFill>
                   <a:srgbClr val="0F1E4A"/>
                 </a:solidFill>
               </a:defRPr>
             </a:pPr>
             <a:r>
-              <a:t>• Transport Choice Binding</a:t>
+              <a:t>• MPD (Media Presentation Description)</a:t>
             </a:r>
           </a:p>
           <a:p>
             <a:pPr>
               <a:spcAft>
-                <a:spcPts val="800"/>
+                <a:spcPts val="700"/>
               </a:spcAft>
-              <a:defRPr sz="1300">
-                <a:solidFill>
-                  <a:srgbClr val="1E293B"/>
+              <a:defRPr sz="1250">
+                <a:solidFill>
+                  <a:srgbClr val="0F172A"/>
                 </a:solidFill>
               </a:defRPr>
             </a:pPr>
             <a:r>
-              <a:t>   App chooses `SOCK_STREAM` (TCP for reliability, order, flow control) or `SOCK_DGRAM` (UDP for speed, low overhead, multicasting).</a:t>
+              <a:t>   An XML manifest file listing the URLs and bitrates for all chunks across every quality level.</a:t>
             </a:r>
           </a:p>
           <a:p>
@@ -4053,29 +4197,29 @@
               <a:spcAft>
                 <a:spcPts val="200"/>
               </a:spcAft>
-              <a:defRPr b="1" sz="1500">
+              <a:defRPr b="1" sz="1450">
                 <a:solidFill>
                   <a:srgbClr val="0F1E4A"/>
                 </a:solidFill>
               </a:defRPr>
             </a:pPr>
             <a:r>
-              <a:t>• Port Number Binding</a:t>
+              <a:t>• Client-Side Dynamic Adaptation</a:t>
             </a:r>
           </a:p>
           <a:p>
             <a:pPr>
               <a:spcAft>
-                <a:spcPts val="800"/>
+                <a:spcPts val="700"/>
               </a:spcAft>
-              <a:defRPr sz="1300">
-                <a:solidFill>
-                  <a:srgbClr val="1E293B"/>
+              <a:defRPr sz="1250">
+                <a:solidFill>
+                  <a:srgbClr val="0F172A"/>
                 </a:solidFill>
               </a:defRPr>
             </a:pPr>
             <a:r>
-              <a:t>   Servers bind to well-known ports (&lt; 1024, root privilege) while clients are assigned ephemeral ports (49152 - 65535).</a:t>
+              <a:t>   The client player continuously monitors available download bandwidth and buffer occupancy. It dynamically requests high-quality chunks when bandwidth is ample, and gracefully steps down to lower bitrates to avoid playback stalling.</a:t>
             </a:r>
           </a:p>
           <a:p>
@@ -4083,29 +4227,29 @@
               <a:spcAft>
                 <a:spcPts val="200"/>
               </a:spcAft>
-              <a:defRPr b="1" sz="1500">
+              <a:defRPr b="1" sz="1450">
                 <a:solidFill>
                   <a:srgbClr val="0F1E4A"/>
                 </a:solidFill>
               </a:defRPr>
             </a:pPr>
             <a:r>
-              <a:t>• Application Layer Framing</a:t>
+              <a:t>• Transport over HTTP/TCP</a:t>
             </a:r>
           </a:p>
           <a:p>
             <a:pPr>
               <a:spcAft>
-                <a:spcPts val="800"/>
+                <a:spcPts val="700"/>
               </a:spcAft>
-              <a:defRPr sz="1300">
-                <a:solidFill>
-                  <a:srgbClr val="1E293B"/>
+              <a:defRPr sz="1250">
+                <a:solidFill>
+                  <a:srgbClr val="0F172A"/>
                 </a:solidFill>
               </a:defRPr>
             </a:pPr>
             <a:r>
-              <a:t>   Because TCP is a continuous byte-stream without message boundaries, application protocols must implement their own framing (e.g. `\r\n\r\n` delimiter in HTTP, `Content-Length:` header, or ASN.1 TLV).</a:t>
+              <a:t>   Streams over standard HTTP/HTTPS port 80/443, effortlessly traversing firewalls and NATs without requiring proprietary streaming server protocols.</a:t>
             </a:r>
           </a:p>
         </p:txBody>
@@ -4118,14 +4262,14 @@
         </p:nvSpPr>
         <p:spPr>
           <a:xfrm>
-            <a:off x="7955279" y="1280160"/>
-            <a:ext cx="3566160" cy="4846320"/>
+            <a:off x="7955279" y="1234440"/>
+            <a:ext cx="3566160" cy="4892040"/>
           </a:xfrm>
           <a:prstGeom prst="roundRect">
             <a:avLst/>
           </a:prstGeom>
           <a:solidFill>
-            <a:srgbClr val="F1F5F9"/>
+            <a:srgbClr val="F8FAFC"/>
           </a:solidFill>
           <a:ln w="19050">
             <a:solidFill>
@@ -4163,7 +4307,7 @@
         </p:nvSpPr>
         <p:spPr>
           <a:xfrm>
-            <a:off x="8138160" y="1417320"/>
+            <a:off x="8138160" y="1371600"/>
             <a:ext cx="3200400" cy="4572000"/>
           </a:xfrm>
           <a:prstGeom prst="rect">
@@ -4188,7 +4332,7 @@
               </a:defRPr>
             </a:pPr>
             <a:r>
-              <a:t>Module 1 Review</a:t>
+              <a:t>DASH Algorithm</a:t>
             </a:r>
           </a:p>
           <a:p>
@@ -4198,12 +4342,12 @@
               </a:spcAft>
               <a:defRPr sz="1200">
                 <a:solidFill>
-                  <a:srgbClr val="1E293B"/>
+                  <a:srgbClr val="0F172A"/>
                 </a:solidFill>
               </a:defRPr>
             </a:pPr>
             <a:r>
-              <a:t>→ Edge vs Core &amp; Delays</a:t>
+              <a:t>→ MPD Manifest: Lists chunks &amp; bitrates</a:t>
             </a:r>
           </a:p>
           <a:p>
@@ -4213,12 +4357,12 @@
               </a:spcAft>
               <a:defRPr sz="1200">
                 <a:solidFill>
-                  <a:srgbClr val="1E293B"/>
+                  <a:srgbClr val="0F172A"/>
                 </a:solidFill>
               </a:defRPr>
             </a:pPr>
             <a:r>
-              <a:t>→ OSI 7 vs TCP/IP 5 Layers</a:t>
+              <a:t>→ Client measures throughput</a:t>
             </a:r>
           </a:p>
           <a:p>
@@ -4228,12 +4372,12 @@
               </a:spcAft>
               <a:defRPr sz="1200">
                 <a:solidFill>
-                  <a:srgbClr val="1E293B"/>
+                  <a:srgbClr val="0F172A"/>
                 </a:solidFill>
               </a:defRPr>
             </a:pPr>
             <a:r>
-              <a:t>→ Client-Server vs P2P Models</a:t>
+              <a:t>→ If buffer high -&gt; Request 4K/1080p</a:t>
             </a:r>
           </a:p>
           <a:p>
@@ -4243,12 +4387,12 @@
               </a:spcAft>
               <a:defRPr sz="1200">
                 <a:solidFill>
-                  <a:srgbClr val="1E293B"/>
+                  <a:srgbClr val="0F172A"/>
                 </a:solidFill>
               </a:defRPr>
             </a:pPr>
             <a:r>
-              <a:t>→ HTTP, FTP, SMTP, DNS, P2P</a:t>
+              <a:t>→ If bandwidth drops -&gt; Request 720p</a:t>
             </a:r>
           </a:p>
           <a:p>
@@ -4258,12 +4402,12 @@
               </a:spcAft>
               <a:defRPr sz="1200">
                 <a:solidFill>
-                  <a:srgbClr val="1E293B"/>
+                  <a:srgbClr val="0F172A"/>
                 </a:solidFill>
               </a:defRPr>
             </a:pPr>
             <a:r>
-              <a:t>→ All KTU CO1 Topics Covered</a:t>
+              <a:t>→ Zero playback interruption</a:t>
             </a:r>
           </a:p>
         </p:txBody>
@@ -4276,8 +4420,8 @@
         </p:nvSpPr>
         <p:spPr>
           <a:xfrm>
-            <a:off x="731520" y="6309360"/>
-            <a:ext cx="10789920" cy="365760"/>
+            <a:off x="731520" y="6327648"/>
+            <a:ext cx="10789920" cy="320040"/>
           </a:xfrm>
           <a:prstGeom prst="rect">
             <a:avLst/>
@@ -4299,6 +4443,526 @@
             </a:pPr>
             <a:r>
               <a:t>PCCST501 Computer Networks | KTU 2024 Scheme | Prof. Anju Markose | Assistant Professor, Dept. of CSE | VJCET</a:t>
+            </a:r>
+          </a:p>
+        </p:txBody>
+      </p:sp>
+      <p:sp>
+        <p:nvSpPr>
+          <p:cNvPr id="10" name="TextBox 9"/>
+          <p:cNvSpPr txBox="1"/>
+          <p:nvPr/>
+        </p:nvSpPr>
+        <p:spPr>
+          <a:xfrm>
+            <a:off x="6858000" y="6327648"/>
+            <a:ext cx="4572000" cy="320040"/>
+          </a:xfrm>
+          <a:prstGeom prst="rect">
+            <a:avLst/>
+          </a:prstGeom>
+          <a:noFill/>
+        </p:spPr>
+        <p:txBody>
+          <a:bodyPr wrap="none">
+            <a:spAutoFit/>
+          </a:bodyPr>
+          <a:lstStyle/>
+          <a:p>
+            <a:pPr algn="r">
+              <a:defRPr sz="950">
+                <a:solidFill>
+                  <a:srgbClr val="64748B"/>
+                </a:solidFill>
+              </a:defRPr>
+            </a:pPr>
+            <a:r>
+              <a:t>Dept. of CSE, VJCET</a:t>
+            </a:r>
+          </a:p>
+        </p:txBody>
+      </p:sp>
+    </p:spTree>
+  </p:cSld>
+  <p:clrMapOvr>
+    <a:masterClrMapping/>
+  </p:clrMapOvr>
+</p:sld>
+</file>
+
+<file path=ppt/slides/slide4.xml><?xml version="1.0" encoding="utf-8"?>
+<p:sld xmlns:a="http://schemas.openxmlformats.org/drawingml/2006/main" xmlns:p="http://schemas.openxmlformats.org/presentationml/2006/main" xmlns:r="http://schemas.openxmlformats.org/officeDocument/2006/relationships">
+  <p:cSld>
+    <p:spTree>
+      <p:nvGrpSpPr>
+        <p:cNvPr id="1" name=""/>
+        <p:cNvGrpSpPr/>
+        <p:nvPr/>
+      </p:nvGrpSpPr>
+      <p:grpSpPr/>
+      <p:sp>
+        <p:nvSpPr>
+          <p:cNvPr id="2" name="Rectangle 1"/>
+          <p:cNvSpPr/>
+          <p:nvPr/>
+        </p:nvSpPr>
+        <p:spPr>
+          <a:xfrm>
+            <a:off x="0" y="0"/>
+            <a:ext cx="12191695" cy="1005840"/>
+          </a:xfrm>
+          <a:prstGeom prst="rect">
+            <a:avLst/>
+          </a:prstGeom>
+          <a:solidFill>
+            <a:srgbClr val="0F1E4A"/>
+          </a:solidFill>
+          <a:ln>
+            <a:noFill/>
+          </a:ln>
+        </p:spPr>
+        <p:style>
+          <a:lnRef idx="1">
+            <a:schemeClr val="accent1"/>
+          </a:lnRef>
+          <a:fillRef idx="3">
+            <a:schemeClr val="accent1"/>
+          </a:fillRef>
+          <a:effectRef idx="2">
+            <a:schemeClr val="accent1"/>
+          </a:effectRef>
+          <a:fontRef idx="minor">
+            <a:schemeClr val="lt1"/>
+          </a:fontRef>
+        </p:style>
+        <p:txBody>
+          <a:bodyPr rtlCol="0" anchor="ctr"/>
+          <a:lstStyle/>
+          <a:p>
+            <a:pPr algn="ctr"/>
+          </a:p>
+        </p:txBody>
+      </p:sp>
+      <p:sp>
+        <p:nvSpPr>
+          <p:cNvPr id="3" name="Rectangle 2"/>
+          <p:cNvSpPr/>
+          <p:nvPr/>
+        </p:nvSpPr>
+        <p:spPr>
+          <a:xfrm>
+            <a:off x="0" y="969264"/>
+            <a:ext cx="12191695" cy="36576"/>
+          </a:xfrm>
+          <a:prstGeom prst="rect">
+            <a:avLst/>
+          </a:prstGeom>
+          <a:solidFill>
+            <a:srgbClr val="D97706"/>
+          </a:solidFill>
+          <a:ln>
+            <a:noFill/>
+          </a:ln>
+        </p:spPr>
+        <p:style>
+          <a:lnRef idx="1">
+            <a:schemeClr val="accent1"/>
+          </a:lnRef>
+          <a:fillRef idx="3">
+            <a:schemeClr val="accent1"/>
+          </a:fillRef>
+          <a:effectRef idx="2">
+            <a:schemeClr val="accent1"/>
+          </a:effectRef>
+          <a:fontRef idx="minor">
+            <a:schemeClr val="lt1"/>
+          </a:fontRef>
+        </p:style>
+        <p:txBody>
+          <a:bodyPr rtlCol="0" anchor="ctr"/>
+          <a:lstStyle/>
+          <a:p>
+            <a:pPr algn="ctr"/>
+          </a:p>
+        </p:txBody>
+      </p:sp>
+      <p:sp>
+        <p:nvSpPr>
+          <p:cNvPr id="4" name="TextBox 3"/>
+          <p:cNvSpPr txBox="1"/>
+          <p:nvPr/>
+        </p:nvSpPr>
+        <p:spPr>
+          <a:xfrm>
+            <a:off x="731520" y="164592"/>
+            <a:ext cx="8412480" cy="685800"/>
+          </a:xfrm>
+          <a:prstGeom prst="rect">
+            <a:avLst/>
+          </a:prstGeom>
+          <a:noFill/>
+        </p:spPr>
+        <p:txBody>
+          <a:bodyPr wrap="none">
+            <a:spAutoFit/>
+          </a:bodyPr>
+          <a:lstStyle/>
+          <a:p>
+            <a:pPr>
+              <a:defRPr b="1" sz="2100">
+                <a:solidFill>
+                  <a:srgbClr val="F8FAFC"/>
+                </a:solidFill>
+              </a:defRPr>
+            </a:pPr>
+            <a:r>
+              <a:t>🎯 Exam Booster &amp; Review: CDN &amp; Streaming Case Study</a:t>
+            </a:r>
+          </a:p>
+        </p:txBody>
+      </p:sp>
+      <p:sp>
+        <p:nvSpPr>
+          <p:cNvPr id="5" name="TextBox 4"/>
+          <p:cNvSpPr txBox="1"/>
+          <p:nvPr/>
+        </p:nvSpPr>
+        <p:spPr>
+          <a:xfrm>
+            <a:off x="8229600" y="164592"/>
+            <a:ext cx="3291840" cy="685800"/>
+          </a:xfrm>
+          <a:prstGeom prst="rect">
+            <a:avLst/>
+          </a:prstGeom>
+          <a:noFill/>
+        </p:spPr>
+        <p:txBody>
+          <a:bodyPr wrap="none">
+            <a:spAutoFit/>
+          </a:bodyPr>
+          <a:lstStyle/>
+          <a:p>
+            <a:pPr algn="r">
+              <a:defRPr b="1" sz="1300">
+                <a:solidFill>
+                  <a:srgbClr val="D97706"/>
+                </a:solidFill>
+              </a:defRPr>
+            </a:pPr>
+            <a:r>
+              <a:t>M1.9</a:t>
+            </a:r>
+          </a:p>
+        </p:txBody>
+      </p:sp>
+      <p:sp>
+        <p:nvSpPr>
+          <p:cNvPr id="6" name="Rounded Rectangle 5"/>
+          <p:cNvSpPr/>
+          <p:nvPr/>
+        </p:nvSpPr>
+        <p:spPr>
+          <a:xfrm>
+            <a:off x="731520" y="1234440"/>
+            <a:ext cx="5303520" cy="4892040"/>
+          </a:xfrm>
+          <a:prstGeom prst="roundRect">
+            <a:avLst/>
+          </a:prstGeom>
+          <a:solidFill>
+            <a:srgbClr val="FEF3C7"/>
+          </a:solidFill>
+          <a:ln w="19050">
+            <a:solidFill>
+              <a:srgbClr val="D97706"/>
+            </a:solidFill>
+          </a:ln>
+        </p:spPr>
+        <p:style>
+          <a:lnRef idx="1">
+            <a:schemeClr val="accent1"/>
+          </a:lnRef>
+          <a:fillRef idx="3">
+            <a:schemeClr val="accent1"/>
+          </a:fillRef>
+          <a:effectRef idx="2">
+            <a:schemeClr val="accent1"/>
+          </a:effectRef>
+          <a:fontRef idx="minor">
+            <a:schemeClr val="lt1"/>
+          </a:fontRef>
+        </p:style>
+        <p:txBody>
+          <a:bodyPr rtlCol="0" anchor="ctr"/>
+          <a:lstStyle/>
+          <a:p>
+            <a:pPr algn="ctr"/>
+          </a:p>
+        </p:txBody>
+      </p:sp>
+      <p:sp>
+        <p:nvSpPr>
+          <p:cNvPr id="7" name="TextBox 6"/>
+          <p:cNvSpPr txBox="1"/>
+          <p:nvPr/>
+        </p:nvSpPr>
+        <p:spPr>
+          <a:xfrm>
+            <a:off x="914400" y="1371600"/>
+            <a:ext cx="4937760" cy="4572000"/>
+          </a:xfrm>
+          <a:prstGeom prst="rect">
+            <a:avLst/>
+          </a:prstGeom>
+          <a:noFill/>
+        </p:spPr>
+        <p:txBody>
+          <a:bodyPr wrap="square">
+            <a:spAutoFit/>
+          </a:bodyPr>
+          <a:lstStyle/>
+          <a:p>
+            <a:pPr>
+              <a:spcAft>
+                <a:spcPts val="1000"/>
+              </a:spcAft>
+              <a:defRPr b="1" sz="1450">
+                <a:solidFill>
+                  <a:srgbClr val="D97706"/>
+                </a:solidFill>
+              </a:defRPr>
+            </a:pPr>
+            <a:r>
+              <a:t>📚 KTU High-Yield Questions (K2 Understand)</a:t>
+            </a:r>
+          </a:p>
+          <a:p>
+            <a:pPr>
+              <a:spcAft>
+                <a:spcPts val="700"/>
+              </a:spcAft>
+              <a:defRPr sz="1200">
+                <a:solidFill>
+                  <a:srgbClr val="0F172A"/>
+                </a:solidFill>
+              </a:defRPr>
+            </a:pPr>
+            <a:r>
+              <a:t>Q: Explain how Content Distribution Networks (CDNs) use DNS redirection to route user requests to the optimal edge server. (8 Marks)</a:t>
+            </a:r>
+          </a:p>
+          <a:p>
+            <a:pPr>
+              <a:spcAft>
+                <a:spcPts val="700"/>
+              </a:spcAft>
+              <a:defRPr sz="1200">
+                <a:solidFill>
+                  <a:srgbClr val="0F172A"/>
+                </a:solidFill>
+              </a:defRPr>
+            </a:pPr>
+            <a:r>
+              <a:t>Q: Describe the architecture and working of Dynamic Adaptive Streaming over HTTP (DASH). (7 Marks)</a:t>
+            </a:r>
+          </a:p>
+        </p:txBody>
+      </p:sp>
+      <p:sp>
+        <p:nvSpPr>
+          <p:cNvPr id="8" name="Rounded Rectangle 7"/>
+          <p:cNvSpPr/>
+          <p:nvPr/>
+        </p:nvSpPr>
+        <p:spPr>
+          <a:xfrm>
+            <a:off x="6309360" y="1234440"/>
+            <a:ext cx="5212080" cy="4892040"/>
+          </a:xfrm>
+          <a:prstGeom prst="roundRect">
+            <a:avLst/>
+          </a:prstGeom>
+          <a:solidFill>
+            <a:srgbClr val="EEF2FF"/>
+          </a:solidFill>
+          <a:ln w="19050">
+            <a:solidFill>
+              <a:srgbClr val="0E7490"/>
+            </a:solidFill>
+          </a:ln>
+        </p:spPr>
+        <p:style>
+          <a:lnRef idx="1">
+            <a:schemeClr val="accent1"/>
+          </a:lnRef>
+          <a:fillRef idx="3">
+            <a:schemeClr val="accent1"/>
+          </a:fillRef>
+          <a:effectRef idx="2">
+            <a:schemeClr val="accent1"/>
+          </a:effectRef>
+          <a:fontRef idx="minor">
+            <a:schemeClr val="lt1"/>
+          </a:fontRef>
+        </p:style>
+        <p:txBody>
+          <a:bodyPr rtlCol="0" anchor="ctr"/>
+          <a:lstStyle/>
+          <a:p>
+            <a:pPr algn="ctr"/>
+          </a:p>
+        </p:txBody>
+      </p:sp>
+      <p:sp>
+        <p:nvSpPr>
+          <p:cNvPr id="9" name="TextBox 8"/>
+          <p:cNvSpPr txBox="1"/>
+          <p:nvPr/>
+        </p:nvSpPr>
+        <p:spPr>
+          <a:xfrm>
+            <a:off x="6492240" y="1371600"/>
+            <a:ext cx="4846320" cy="4572000"/>
+          </a:xfrm>
+          <a:prstGeom prst="rect">
+            <a:avLst/>
+          </a:prstGeom>
+          <a:noFill/>
+        </p:spPr>
+        <p:txBody>
+          <a:bodyPr wrap="square">
+            <a:spAutoFit/>
+          </a:bodyPr>
+          <a:lstStyle/>
+          <a:p>
+            <a:pPr>
+              <a:spcAft>
+                <a:spcPts val="1000"/>
+              </a:spcAft>
+              <a:defRPr b="1" sz="1450">
+                <a:solidFill>
+                  <a:srgbClr val="0E7490"/>
+                </a:solidFill>
+              </a:defRPr>
+            </a:pPr>
+            <a:r>
+              <a:t>💡 Critical Conceptual Takeaways</a:t>
+            </a:r>
+          </a:p>
+          <a:p>
+            <a:pPr>
+              <a:spcAft>
+                <a:spcPts val="600"/>
+              </a:spcAft>
+              <a:defRPr sz="1200">
+                <a:solidFill>
+                  <a:srgbClr val="0F172A"/>
+                </a:solidFill>
+              </a:defRPr>
+            </a:pPr>
+            <a:r>
+              <a:t>✔ CDNs bring content close to users, cutting down WAN transit delays and backbone congestion.</a:t>
+            </a:r>
+          </a:p>
+          <a:p>
+            <a:pPr>
+              <a:spcAft>
+                <a:spcPts val="600"/>
+              </a:spcAft>
+              <a:defRPr sz="1200">
+                <a:solidFill>
+                  <a:srgbClr val="0F172A"/>
+                </a:solidFill>
+              </a:defRPr>
+            </a:pPr>
+            <a:r>
+              <a:t>✔ DNS CNAME redirection enables real-time dynamic traffic routing based on network conditions.</a:t>
+            </a:r>
+          </a:p>
+          <a:p>
+            <a:pPr>
+              <a:spcAft>
+                <a:spcPts val="600"/>
+              </a:spcAft>
+              <a:defRPr sz="1200">
+                <a:solidFill>
+                  <a:srgbClr val="0F172A"/>
+                </a:solidFill>
+              </a:defRPr>
+            </a:pPr>
+            <a:r>
+              <a:t>✔ DASH shifts streaming intelligence to the client, adapting video bitrate in real time.</a:t>
+            </a:r>
+          </a:p>
+        </p:txBody>
+      </p:sp>
+      <p:sp>
+        <p:nvSpPr>
+          <p:cNvPr id="10" name="TextBox 9"/>
+          <p:cNvSpPr txBox="1"/>
+          <p:nvPr/>
+        </p:nvSpPr>
+        <p:spPr>
+          <a:xfrm>
+            <a:off x="731520" y="6327648"/>
+            <a:ext cx="10789920" cy="320040"/>
+          </a:xfrm>
+          <a:prstGeom prst="rect">
+            <a:avLst/>
+          </a:prstGeom>
+          <a:noFill/>
+        </p:spPr>
+        <p:txBody>
+          <a:bodyPr wrap="none">
+            <a:spAutoFit/>
+          </a:bodyPr>
+          <a:lstStyle/>
+          <a:p>
+            <a:pPr>
+              <a:defRPr sz="950">
+                <a:solidFill>
+                  <a:srgbClr val="64748B"/>
+                </a:solidFill>
+              </a:defRPr>
+            </a:pPr>
+            <a:r>
+              <a:t>PCCST501 Computer Networks | KTU 2024 Scheme | Prof. Anju Markose | Assistant Professor, Dept. of CSE | VJCET</a:t>
+            </a:r>
+          </a:p>
+        </p:txBody>
+      </p:sp>
+      <p:sp>
+        <p:nvSpPr>
+          <p:cNvPr id="11" name="TextBox 10"/>
+          <p:cNvSpPr txBox="1"/>
+          <p:nvPr/>
+        </p:nvSpPr>
+        <p:spPr>
+          <a:xfrm>
+            <a:off x="6858000" y="6327648"/>
+            <a:ext cx="4572000" cy="320040"/>
+          </a:xfrm>
+          <a:prstGeom prst="rect">
+            <a:avLst/>
+          </a:prstGeom>
+          <a:noFill/>
+        </p:spPr>
+        <p:txBody>
+          <a:bodyPr wrap="none">
+            <a:spAutoFit/>
+          </a:bodyPr>
+          <a:lstStyle/>
+          <a:p>
+            <a:pPr algn="r">
+              <a:defRPr sz="950">
+                <a:solidFill>
+                  <a:srgbClr val="64748B"/>
+                </a:solidFill>
+              </a:defRPr>
+            </a:pPr>
+            <a:r>
+              <a:t>Dept. of CSE, VJCET</a:t>
             </a:r>
           </a:p>
         </p:txBody>
